--- a/insights/260807-CoC-KN/large-models-refresh/model_landscape_trends_one_slide.pptx
+++ b/insights/260807-CoC-KN/large-models-refresh/model_landscape_trends_one_slide.pptx
@@ -2,13 +2,13 @@
 <file path=ppt/presentation.xml><?xml version="1.0" encoding="utf-8"?>
 <p:presentation xmlns:p="http://schemas.openxmlformats.org/presentationml/2006/main">
   <p:sldMasterIdLst>
-    <p:sldMasterId xmlns:r="http://schemas.openxmlformats.org/officeDocument/2006/relationships" id="2147483648" r:id="Rf9f36817508c4182"/>
+    <p:sldMasterId xmlns:r="http://schemas.openxmlformats.org/officeDocument/2006/relationships" id="2147483648" r:id="Rd00d17f3f2cb4ab2"/>
   </p:sldMasterIdLst>
   <p:notesMasterIdLst>
-    <p:notesMasterId xmlns:r="http://schemas.openxmlformats.org/officeDocument/2006/relationships" r:id="Rc921cb914eaa4915"/>
+    <p:notesMasterId xmlns:r="http://schemas.openxmlformats.org/officeDocument/2006/relationships" r:id="R46100385b4994fa3"/>
   </p:notesMasterIdLst>
   <p:sldIdLst>
-    <p:sldId xmlns:r="http://schemas.openxmlformats.org/officeDocument/2006/relationships" id="256" r:id="R42365c21a12a418a"/>
+    <p:sldId xmlns:r="http://schemas.openxmlformats.org/officeDocument/2006/relationships" id="256" r:id="R01914ec6eb744528"/>
   </p:sldIdLst>
   <p:sldSz cx="12192000" cy="6858000"/>
   <p:notesSz cx="6858000" cy="9144000"/>
@@ -200,14 +200,14 @@
     </a:clrScheme>
     <a:fontScheme name="Office">
       <a:majorFont>
-        <a:latin typeface="Calibri Light"/>
-        <a:ea typeface="Calibri Light"/>
-        <a:cs typeface="Calibri Light"/>
+        <a:latin typeface="Alibaba PuHuiTi"/>
+        <a:ea typeface="Alibaba PuHuiTi"/>
+        <a:cs typeface="Alibaba PuHuiTi"/>
       </a:majorFont>
       <a:minorFont>
-        <a:latin typeface="Calibri"/>
-        <a:ea typeface="Calibri"/>
-        <a:cs typeface="Calibri"/>
+        <a:latin typeface="Alibaba PuHuiTi"/>
+        <a:ea typeface="Alibaba PuHuiTi"/>
+        <a:cs typeface="Alibaba PuHuiTi"/>
       </a:minorFont>
     </a:fontScheme>
     <a:fmtScheme name="ChatGPT">
@@ -530,7 +530,7 @@
   </p:cSld>
   <p:clrMap bg1="lt1" tx1="dk1" bg2="lt2" tx2="dk2" accent1="accent1" accent2="accent2" accent3="accent3" accent4="accent4" accent5="accent5" accent6="accent6" hlink="hlink" folHlink="folHlink"/>
   <p:sldLayoutIdLst>
-    <p:sldLayoutId xmlns:r="http://schemas.openxmlformats.org/officeDocument/2006/relationships" id="2147483649" r:id="R759a780ff375434d"/>
+    <p:sldLayoutId xmlns:r="http://schemas.openxmlformats.org/officeDocument/2006/relationships" id="2147483649" r:id="R4e697fb3c15e40ff"/>
   </p:sldLayoutIdLst>
   <p:txStyles>
     <p:titleStyle>
@@ -546,9 +546,9 @@
           <a:solidFill>
             <a:schemeClr val="tx1"/>
           </a:solidFill>
-          <a:latin typeface="+mj-lt"/>
-          <a:ea typeface="+mj-lt"/>
-          <a:cs typeface="+mj-lt"/>
+          <a:latin typeface="Alibaba PuHuiTi"/>
+          <a:ea typeface="Alibaba PuHuiTi"/>
+          <a:cs typeface="Alibaba PuHuiTi"/>
         </a:defRPr>
       </a:lvl1pPr>
     </p:titleStyle>
@@ -565,9 +565,9 @@
           <a:solidFill>
             <a:schemeClr val="tx1"/>
           </a:solidFill>
-          <a:latin typeface="+mn-lt"/>
-          <a:ea typeface="+mn-lt"/>
-          <a:cs typeface="+mn-lt"/>
+          <a:latin typeface="Alibaba PuHuiTi"/>
+          <a:ea typeface="Alibaba PuHuiTi"/>
+          <a:cs typeface="Alibaba PuHuiTi"/>
         </a:defRPr>
       </a:lvl1pPr>
       <a:lvl2pPr xmlns:a="http://schemas.openxmlformats.org/drawingml/2006/main" marL="685800" indent="-228600" algn="l">
@@ -582,9 +582,9 @@
           <a:solidFill>
             <a:schemeClr val="tx1"/>
           </a:solidFill>
-          <a:latin typeface="+mn-lt"/>
-          <a:ea typeface="+mn-lt"/>
-          <a:cs typeface="+mn-lt"/>
+          <a:latin typeface="Alibaba PuHuiTi"/>
+          <a:ea typeface="Alibaba PuHuiTi"/>
+          <a:cs typeface="Alibaba PuHuiTi"/>
         </a:defRPr>
       </a:lvl2pPr>
       <a:lvl3pPr xmlns:a="http://schemas.openxmlformats.org/drawingml/2006/main" marL="1143000" indent="-228600" algn="l">
@@ -599,9 +599,9 @@
           <a:solidFill>
             <a:schemeClr val="tx1"/>
           </a:solidFill>
-          <a:latin typeface="+mn-lt"/>
-          <a:ea typeface="+mn-lt"/>
-          <a:cs typeface="+mn-lt"/>
+          <a:latin typeface="Alibaba PuHuiTi"/>
+          <a:ea typeface="Alibaba PuHuiTi"/>
+          <a:cs typeface="Alibaba PuHuiTi"/>
         </a:defRPr>
       </a:lvl3pPr>
       <a:lvl4pPr xmlns:a="http://schemas.openxmlformats.org/drawingml/2006/main" marL="1600200" indent="-228600" algn="l">
@@ -616,9 +616,9 @@
           <a:solidFill>
             <a:schemeClr val="tx1"/>
           </a:solidFill>
-          <a:latin typeface="+mn-lt"/>
-          <a:ea typeface="+mn-lt"/>
-          <a:cs typeface="+mn-lt"/>
+          <a:latin typeface="Alibaba PuHuiTi"/>
+          <a:ea typeface="Alibaba PuHuiTi"/>
+          <a:cs typeface="Alibaba PuHuiTi"/>
         </a:defRPr>
       </a:lvl4pPr>
       <a:lvl5pPr xmlns:a="http://schemas.openxmlformats.org/drawingml/2006/main" marL="2057400" indent="-228600" algn="l">
@@ -633,9 +633,9 @@
           <a:solidFill>
             <a:schemeClr val="tx1"/>
           </a:solidFill>
-          <a:latin typeface="+mn-lt"/>
-          <a:ea typeface="+mn-lt"/>
-          <a:cs typeface="+mn-lt"/>
+          <a:latin typeface="Alibaba PuHuiTi"/>
+          <a:ea typeface="Alibaba PuHuiTi"/>
+          <a:cs typeface="Alibaba PuHuiTi"/>
         </a:defRPr>
       </a:lvl5pPr>
       <a:lvl6pPr xmlns:a="http://schemas.openxmlformats.org/drawingml/2006/main" marL="2514600" indent="-228600" algn="l">
@@ -650,9 +650,9 @@
           <a:solidFill>
             <a:schemeClr val="tx1"/>
           </a:solidFill>
-          <a:latin typeface="+mn-lt"/>
-          <a:ea typeface="+mn-lt"/>
-          <a:cs typeface="+mn-lt"/>
+          <a:latin typeface="Alibaba PuHuiTi"/>
+          <a:ea typeface="Alibaba PuHuiTi"/>
+          <a:cs typeface="Alibaba PuHuiTi"/>
         </a:defRPr>
       </a:lvl6pPr>
       <a:lvl7pPr xmlns:a="http://schemas.openxmlformats.org/drawingml/2006/main" marL="2971800" indent="-228600" algn="l">
@@ -667,9 +667,9 @@
           <a:solidFill>
             <a:schemeClr val="tx1"/>
           </a:solidFill>
-          <a:latin typeface="+mn-lt"/>
-          <a:ea typeface="+mn-lt"/>
-          <a:cs typeface="+mn-lt"/>
+          <a:latin typeface="Alibaba PuHuiTi"/>
+          <a:ea typeface="Alibaba PuHuiTi"/>
+          <a:cs typeface="Alibaba PuHuiTi"/>
         </a:defRPr>
       </a:lvl7pPr>
       <a:lvl8pPr xmlns:a="http://schemas.openxmlformats.org/drawingml/2006/main" marL="3429000" indent="-228600" algn="l">
@@ -684,9 +684,9 @@
           <a:solidFill>
             <a:schemeClr val="tx1"/>
           </a:solidFill>
-          <a:latin typeface="+mn-lt"/>
-          <a:ea typeface="+mn-lt"/>
-          <a:cs typeface="+mn-lt"/>
+          <a:latin typeface="Alibaba PuHuiTi"/>
+          <a:ea typeface="Alibaba PuHuiTi"/>
+          <a:cs typeface="Alibaba PuHuiTi"/>
         </a:defRPr>
       </a:lvl8pPr>
       <a:lvl9pPr xmlns:a="http://schemas.openxmlformats.org/drawingml/2006/main" marL="3886200" indent="-228600" algn="l">
@@ -701,9 +701,9 @@
           <a:solidFill>
             <a:schemeClr val="tx1"/>
           </a:solidFill>
-          <a:latin typeface="+mn-lt"/>
-          <a:ea typeface="+mn-lt"/>
-          <a:cs typeface="+mn-lt"/>
+          <a:latin typeface="Alibaba PuHuiTi"/>
+          <a:ea typeface="Alibaba PuHuiTi"/>
+          <a:cs typeface="Alibaba PuHuiTi"/>
         </a:defRPr>
       </a:lvl9pPr>
     </p:bodyStyle>
@@ -714,9 +714,9 @@
           <a:solidFill>
             <a:schemeClr val="tx1"/>
           </a:solidFill>
-          <a:latin typeface="+mn-lt"/>
-          <a:ea typeface="+mn-lt"/>
-          <a:cs typeface="+mn-lt"/>
+          <a:latin typeface="Alibaba PuHuiTi"/>
+          <a:ea typeface="Alibaba PuHuiTi"/>
+          <a:cs typeface="Alibaba PuHuiTi"/>
         </a:defRPr>
       </a:lvl1pPr>
       <a:lvl2pPr xmlns:a="http://schemas.openxmlformats.org/drawingml/2006/main" marL="457200" algn="l">
@@ -725,9 +725,9 @@
           <a:solidFill>
             <a:schemeClr val="tx1"/>
           </a:solidFill>
-          <a:latin typeface="+mn-lt"/>
-          <a:ea typeface="+mn-lt"/>
-          <a:cs typeface="+mn-lt"/>
+          <a:latin typeface="Alibaba PuHuiTi"/>
+          <a:ea typeface="Alibaba PuHuiTi"/>
+          <a:cs typeface="Alibaba PuHuiTi"/>
         </a:defRPr>
       </a:lvl2pPr>
       <a:lvl3pPr xmlns:a="http://schemas.openxmlformats.org/drawingml/2006/main" marL="914400" algn="l">
@@ -736,9 +736,9 @@
           <a:solidFill>
             <a:schemeClr val="tx1"/>
           </a:solidFill>
-          <a:latin typeface="+mn-lt"/>
-          <a:ea typeface="+mn-lt"/>
-          <a:cs typeface="+mn-lt"/>
+          <a:latin typeface="Alibaba PuHuiTi"/>
+          <a:ea typeface="Alibaba PuHuiTi"/>
+          <a:cs typeface="Alibaba PuHuiTi"/>
         </a:defRPr>
       </a:lvl3pPr>
       <a:lvl4pPr xmlns:a="http://schemas.openxmlformats.org/drawingml/2006/main" marL="1371600" algn="l">
@@ -747,9 +747,9 @@
           <a:solidFill>
             <a:schemeClr val="tx1"/>
           </a:solidFill>
-          <a:latin typeface="+mn-lt"/>
-          <a:ea typeface="+mn-lt"/>
-          <a:cs typeface="+mn-lt"/>
+          <a:latin typeface="Alibaba PuHuiTi"/>
+          <a:ea typeface="Alibaba PuHuiTi"/>
+          <a:cs typeface="Alibaba PuHuiTi"/>
         </a:defRPr>
       </a:lvl4pPr>
       <a:lvl5pPr xmlns:a="http://schemas.openxmlformats.org/drawingml/2006/main" marL="1828800" algn="l">
@@ -758,9 +758,9 @@
           <a:solidFill>
             <a:schemeClr val="tx1"/>
           </a:solidFill>
-          <a:latin typeface="+mn-lt"/>
-          <a:ea typeface="+mn-lt"/>
-          <a:cs typeface="+mn-lt"/>
+          <a:latin typeface="Alibaba PuHuiTi"/>
+          <a:ea typeface="Alibaba PuHuiTi"/>
+          <a:cs typeface="Alibaba PuHuiTi"/>
         </a:defRPr>
       </a:lvl5pPr>
       <a:lvl6pPr xmlns:a="http://schemas.openxmlformats.org/drawingml/2006/main" marL="2286000" algn="l">
@@ -769,9 +769,9 @@
           <a:solidFill>
             <a:schemeClr val="tx1"/>
           </a:solidFill>
-          <a:latin typeface="+mn-lt"/>
-          <a:ea typeface="+mn-lt"/>
-          <a:cs typeface="+mn-lt"/>
+          <a:latin typeface="Alibaba PuHuiTi"/>
+          <a:ea typeface="Alibaba PuHuiTi"/>
+          <a:cs typeface="Alibaba PuHuiTi"/>
         </a:defRPr>
       </a:lvl6pPr>
       <a:lvl7pPr xmlns:a="http://schemas.openxmlformats.org/drawingml/2006/main" marL="2743200" algn="l">
@@ -780,9 +780,9 @@
           <a:solidFill>
             <a:schemeClr val="tx1"/>
           </a:solidFill>
-          <a:latin typeface="+mn-lt"/>
-          <a:ea typeface="+mn-lt"/>
-          <a:cs typeface="+mn-lt"/>
+          <a:latin typeface="Alibaba PuHuiTi"/>
+          <a:ea typeface="Alibaba PuHuiTi"/>
+          <a:cs typeface="Alibaba PuHuiTi"/>
         </a:defRPr>
       </a:lvl7pPr>
       <a:lvl8pPr xmlns:a="http://schemas.openxmlformats.org/drawingml/2006/main" marL="3200400" algn="l">
@@ -791,9 +791,9 @@
           <a:solidFill>
             <a:schemeClr val="tx1"/>
           </a:solidFill>
-          <a:latin typeface="+mn-lt"/>
-          <a:ea typeface="+mn-lt"/>
-          <a:cs typeface="+mn-lt"/>
+          <a:latin typeface="Alibaba PuHuiTi"/>
+          <a:ea typeface="Alibaba PuHuiTi"/>
+          <a:cs typeface="Alibaba PuHuiTi"/>
         </a:defRPr>
       </a:lvl8pPr>
       <a:lvl9pPr xmlns:a="http://schemas.openxmlformats.org/drawingml/2006/main" marL="3657600" algn="l">
@@ -802,9 +802,9 @@
           <a:solidFill>
             <a:schemeClr val="tx1"/>
           </a:solidFill>
-          <a:latin typeface="+mn-lt"/>
-          <a:ea typeface="+mn-lt"/>
-          <a:cs typeface="+mn-lt"/>
+          <a:latin typeface="Alibaba PuHuiTi"/>
+          <a:ea typeface="Alibaba PuHuiTi"/>
+          <a:cs typeface="Alibaba PuHuiTi"/>
         </a:defRPr>
       </a:lvl9pPr>
     </p:otherStyle>
@@ -855,14 +855,14 @@
     </a:clrScheme>
     <a:fontScheme name="Office">
       <a:majorFont>
-        <a:latin typeface="Calibri Light"/>
-        <a:ea typeface="Calibri Light"/>
-        <a:cs typeface="Calibri Light"/>
+        <a:latin typeface="Alibaba PuHuiTi"/>
+        <a:ea typeface="Alibaba PuHuiTi"/>
+        <a:cs typeface="Alibaba PuHuiTi"/>
       </a:majorFont>
       <a:minorFont>
-        <a:latin typeface="Calibri"/>
-        <a:ea typeface="Calibri"/>
-        <a:cs typeface="Calibri"/>
+        <a:latin typeface="Alibaba PuHuiTi"/>
+        <a:ea typeface="Alibaba PuHuiTi"/>
+        <a:cs typeface="Alibaba PuHuiTi"/>
       </a:minorFont>
     </a:fontScheme>
     <a:fmtScheme name="ChatGPT">
@@ -1109,6 +1109,7 @@
           <a:lstStyle xmlns:a="http://schemas.openxmlformats.org/drawingml/2006/main"/>
           <a:p xmlns:a="http://schemas.openxmlformats.org/drawingml/2006/main">
             <a:pPr>
+              <a:buNone/>
               <a:defRPr sz="975" b="1">
                 <a:solidFill>
                   <a:srgbClr val="1473C9"/>
@@ -1159,6 +1160,7 @@
           <a:lstStyle xmlns:a="http://schemas.openxmlformats.org/drawingml/2006/main"/>
           <a:p xmlns:a="http://schemas.openxmlformats.org/drawingml/2006/main">
             <a:pPr>
+              <a:buNone/>
               <a:defRPr sz="3150" b="1">
                 <a:solidFill>
                   <a:srgbClr val="15171A"/>
@@ -1209,6 +1211,7 @@
           <a:lstStyle xmlns:a="http://schemas.openxmlformats.org/drawingml/2006/main"/>
           <a:p xmlns:a="http://schemas.openxmlformats.org/drawingml/2006/main">
             <a:pPr>
+              <a:buNone/>
               <a:defRPr sz="1800" b="0">
                 <a:solidFill>
                   <a:srgbClr val="60656B"/>
@@ -1292,6 +1295,7 @@
           <a:lstStyle xmlns:a="http://schemas.openxmlformats.org/drawingml/2006/main"/>
           <a:p xmlns:a="http://schemas.openxmlformats.org/drawingml/2006/main">
             <a:pPr>
+              <a:buNone/>
               <a:defRPr sz="3900" b="1">
                 <a:solidFill>
                   <a:srgbClr val="1473C9"/>
@@ -1342,6 +1346,7 @@
           <a:lstStyle xmlns:a="http://schemas.openxmlformats.org/drawingml/2006/main"/>
           <a:p xmlns:a="http://schemas.openxmlformats.org/drawingml/2006/main">
             <a:pPr>
+              <a:buNone/>
               <a:defRPr sz="1650" b="1">
                 <a:solidFill>
                   <a:srgbClr val="15171A"/>
@@ -1392,6 +1397,7 @@
           <a:lstStyle xmlns:a="http://schemas.openxmlformats.org/drawingml/2006/main"/>
           <a:p xmlns:a="http://schemas.openxmlformats.org/drawingml/2006/main">
             <a:pPr>
+              <a:buNone/>
               <a:defRPr sz="1350" b="0">
                 <a:solidFill>
                   <a:srgbClr val="60656B"/>
@@ -1475,6 +1481,7 @@
           <a:lstStyle xmlns:a="http://schemas.openxmlformats.org/drawingml/2006/main"/>
           <a:p xmlns:a="http://schemas.openxmlformats.org/drawingml/2006/main">
             <a:pPr>
+              <a:buNone/>
               <a:defRPr sz="3900" b="1">
                 <a:solidFill>
                   <a:srgbClr val="15171A"/>
@@ -1525,6 +1532,7 @@
           <a:lstStyle xmlns:a="http://schemas.openxmlformats.org/drawingml/2006/main"/>
           <a:p xmlns:a="http://schemas.openxmlformats.org/drawingml/2006/main">
             <a:pPr>
+              <a:buNone/>
               <a:defRPr sz="1650" b="1">
                 <a:solidFill>
                   <a:srgbClr val="15171A"/>
@@ -1575,6 +1583,7 @@
           <a:lstStyle xmlns:a="http://schemas.openxmlformats.org/drawingml/2006/main"/>
           <a:p xmlns:a="http://schemas.openxmlformats.org/drawingml/2006/main">
             <a:pPr>
+              <a:buNone/>
               <a:defRPr sz="1350" b="0">
                 <a:solidFill>
                   <a:srgbClr val="60656B"/>
@@ -1658,6 +1667,7 @@
           <a:lstStyle xmlns:a="http://schemas.openxmlformats.org/drawingml/2006/main"/>
           <a:p xmlns:a="http://schemas.openxmlformats.org/drawingml/2006/main">
             <a:pPr>
+              <a:buNone/>
               <a:defRPr sz="3900" b="1">
                 <a:solidFill>
                   <a:srgbClr val="15171A"/>
@@ -1708,6 +1718,7 @@
           <a:lstStyle xmlns:a="http://schemas.openxmlformats.org/drawingml/2006/main"/>
           <a:p xmlns:a="http://schemas.openxmlformats.org/drawingml/2006/main">
             <a:pPr>
+              <a:buNone/>
               <a:defRPr sz="1650" b="1">
                 <a:solidFill>
                   <a:srgbClr val="15171A"/>
@@ -1758,6 +1769,7 @@
           <a:lstStyle xmlns:a="http://schemas.openxmlformats.org/drawingml/2006/main"/>
           <a:p xmlns:a="http://schemas.openxmlformats.org/drawingml/2006/main">
             <a:pPr>
+              <a:buNone/>
               <a:defRPr sz="1350" b="0">
                 <a:solidFill>
                   <a:srgbClr val="60656B"/>
@@ -1841,6 +1853,7 @@
           <a:lstStyle xmlns:a="http://schemas.openxmlformats.org/drawingml/2006/main"/>
           <a:p xmlns:a="http://schemas.openxmlformats.org/drawingml/2006/main">
             <a:pPr>
+              <a:buNone/>
               <a:defRPr sz="2100" b="1">
                 <a:solidFill>
                   <a:srgbClr val="15171A"/>
@@ -1891,6 +1904,7 @@
           <a:lstStyle xmlns:a="http://schemas.openxmlformats.org/drawingml/2006/main"/>
           <a:p xmlns:a="http://schemas.openxmlformats.org/drawingml/2006/main">
             <a:pPr>
+              <a:buNone/>
               <a:defRPr sz="1350" b="0">
                 <a:solidFill>
                   <a:srgbClr val="60656B"/>
@@ -1941,6 +1955,7 @@
           <a:lstStyle xmlns:a="http://schemas.openxmlformats.org/drawingml/2006/main"/>
           <a:p xmlns:a="http://schemas.openxmlformats.org/drawingml/2006/main">
             <a:pPr>
+              <a:buNone/>
               <a:defRPr sz="900" b="1">
                 <a:solidFill>
                   <a:srgbClr val="60656B"/>
@@ -1991,6 +2006,7 @@
           <a:lstStyle xmlns:a="http://schemas.openxmlformats.org/drawingml/2006/main"/>
           <a:p xmlns:a="http://schemas.openxmlformats.org/drawingml/2006/main">
             <a:pPr>
+              <a:buNone/>
               <a:defRPr sz="900" b="1">
                 <a:solidFill>
                   <a:srgbClr val="60656B"/>
@@ -2041,6 +2057,7 @@
           <a:lstStyle xmlns:a="http://schemas.openxmlformats.org/drawingml/2006/main"/>
           <a:p xmlns:a="http://schemas.openxmlformats.org/drawingml/2006/main">
             <a:pPr>
+              <a:buNone/>
               <a:defRPr sz="1500" b="1">
                 <a:solidFill>
                   <a:srgbClr val="15171A"/>
@@ -2091,6 +2108,7 @@
           <a:lstStyle xmlns:a="http://schemas.openxmlformats.org/drawingml/2006/main"/>
           <a:p xmlns:a="http://schemas.openxmlformats.org/drawingml/2006/main">
             <a:pPr>
+              <a:buNone/>
               <a:defRPr sz="1875" b="1">
                 <a:solidFill>
                   <a:srgbClr val="1473C9"/>
@@ -2141,6 +2159,7 @@
           <a:lstStyle xmlns:a="http://schemas.openxmlformats.org/drawingml/2006/main"/>
           <a:p xmlns:a="http://schemas.openxmlformats.org/drawingml/2006/main">
             <a:pPr>
+              <a:buNone/>
               <a:defRPr sz="1875" b="1">
                 <a:solidFill>
                   <a:srgbClr val="7450A8"/>
@@ -2224,6 +2243,7 @@
           <a:lstStyle xmlns:a="http://schemas.openxmlformats.org/drawingml/2006/main"/>
           <a:p xmlns:a="http://schemas.openxmlformats.org/drawingml/2006/main">
             <a:pPr>
+              <a:buNone/>
               <a:defRPr sz="1500" b="1">
                 <a:solidFill>
                   <a:srgbClr val="15171A"/>
@@ -2274,6 +2294,7 @@
           <a:lstStyle xmlns:a="http://schemas.openxmlformats.org/drawingml/2006/main"/>
           <a:p xmlns:a="http://schemas.openxmlformats.org/drawingml/2006/main">
             <a:pPr>
+              <a:buNone/>
               <a:defRPr sz="1875" b="1">
                 <a:solidFill>
                   <a:srgbClr val="15171A"/>
@@ -2324,6 +2345,7 @@
           <a:lstStyle xmlns:a="http://schemas.openxmlformats.org/drawingml/2006/main"/>
           <a:p xmlns:a="http://schemas.openxmlformats.org/drawingml/2006/main">
             <a:pPr>
+              <a:buNone/>
               <a:defRPr sz="1875" b="1">
                 <a:solidFill>
                   <a:srgbClr val="7450A8"/>
@@ -2407,6 +2429,7 @@
           <a:lstStyle xmlns:a="http://schemas.openxmlformats.org/drawingml/2006/main"/>
           <a:p xmlns:a="http://schemas.openxmlformats.org/drawingml/2006/main">
             <a:pPr>
+              <a:buNone/>
               <a:defRPr sz="1500" b="1">
                 <a:solidFill>
                   <a:srgbClr val="15171A"/>
@@ -2457,6 +2480,7 @@
           <a:lstStyle xmlns:a="http://schemas.openxmlformats.org/drawingml/2006/main"/>
           <a:p xmlns:a="http://schemas.openxmlformats.org/drawingml/2006/main">
             <a:pPr>
+              <a:buNone/>
               <a:defRPr sz="750" b="0">
                 <a:solidFill>
                   <a:srgbClr val="60656B"/>
@@ -2527,14 +2551,14 @@
     </a:clrScheme>
     <a:fontScheme name="Office">
       <a:majorFont>
-        <a:latin typeface="Calibri Light"/>
-        <a:ea typeface="Calibri Light"/>
-        <a:cs typeface="Calibri Light"/>
+        <a:latin typeface="Alibaba PuHuiTi"/>
+        <a:ea typeface="Alibaba PuHuiTi"/>
+        <a:cs typeface="Alibaba PuHuiTi"/>
       </a:majorFont>
       <a:minorFont>
-        <a:latin typeface="Calibri"/>
-        <a:ea typeface="Calibri"/>
-        <a:cs typeface="Calibri"/>
+        <a:latin typeface="Alibaba PuHuiTi"/>
+        <a:ea typeface="Alibaba PuHuiTi"/>
+        <a:cs typeface="Alibaba PuHuiTi"/>
       </a:minorFont>
     </a:fontScheme>
     <a:fmtScheme name="ChatGPT">
